--- a/docs/slides/pptx/M2_홍보기획실무.pptx
+++ b/docs/slides/pptx/M2_홍보기획실무.pptx
@@ -3148,7 +3148,7 @@
           </a:fontRef>
         </p:style>
         <p:txBody>
-          <a:bodyPr rtlCol="0" anchor="ctr"/>
+          <a:bodyPr rtlCol="0" anchor="t" wrap="square"/>
           <a:lstStyle/>
           <a:p>
             <a:pPr algn="ctr"/>
@@ -3192,7 +3192,7 @@
           </a:fontRef>
         </p:style>
         <p:txBody>
-          <a:bodyPr rtlCol="0" anchor="ctr"/>
+          <a:bodyPr rtlCol="0" anchor="t" wrap="square"/>
           <a:lstStyle/>
           <a:p>
             <a:pPr algn="ctr"/>
@@ -3236,7 +3236,7 @@
           </a:fontRef>
         </p:style>
         <p:txBody>
-          <a:bodyPr rtlCol="0" anchor="ctr"/>
+          <a:bodyPr rtlCol="0" anchor="t" wrap="square"/>
           <a:lstStyle/>
           <a:p>
             <a:pPr algn="ctr"/>
@@ -3280,7 +3280,7 @@
           </a:fontRef>
         </p:style>
         <p:txBody>
-          <a:bodyPr rtlCol="0" anchor="ctr"/>
+          <a:bodyPr rtlCol="0" anchor="t" wrap="square"/>
           <a:lstStyle/>
           <a:p>
             <a:pPr algn="ctr"/>
@@ -3324,7 +3324,7 @@
           </a:fontRef>
         </p:style>
         <p:txBody>
-          <a:bodyPr rtlCol="0" anchor="ctr"/>
+          <a:bodyPr rtlCol="0" anchor="t" wrap="square"/>
           <a:lstStyle/>
           <a:p>
             <a:pPr algn="ctr"/>
@@ -3368,7 +3368,7 @@
           </a:fontRef>
         </p:style>
         <p:txBody>
-          <a:bodyPr rtlCol="0" anchor="ctr"/>
+          <a:bodyPr rtlCol="0" anchor="t" wrap="square"/>
           <a:lstStyle/>
           <a:p>
             <a:pPr algn="ctr"/>
@@ -3412,7 +3412,7 @@
           </a:fontRef>
         </p:style>
         <p:txBody>
-          <a:bodyPr rtlCol="0" anchor="ctr"/>
+          <a:bodyPr rtlCol="0" anchor="t" wrap="square"/>
           <a:lstStyle/>
           <a:p>
             <a:pPr algn="ctr"/>
@@ -3624,7 +3624,7 @@
           </a:fontRef>
         </p:style>
         <p:txBody>
-          <a:bodyPr rtlCol="0" anchor="ctr"/>
+          <a:bodyPr rtlCol="0" anchor="t" wrap="square"/>
           <a:lstStyle/>
           <a:p>
             <a:pPr algn="ctr"/>
@@ -3926,7 +3926,7 @@
           </a:fontRef>
         </p:style>
         <p:txBody>
-          <a:bodyPr rtlCol="0" anchor="ctr"/>
+          <a:bodyPr rtlCol="0" anchor="t" wrap="square"/>
           <a:lstStyle/>
           <a:p>
             <a:pPr algn="ctr"/>
@@ -4230,7 +4230,7 @@
           </a:fontRef>
         </p:style>
         <p:txBody>
-          <a:bodyPr rtlCol="0" anchor="ctr"/>
+          <a:bodyPr rtlCol="0" anchor="t" wrap="square"/>
           <a:lstStyle/>
           <a:p>
             <a:pPr algn="ctr"/>
@@ -4345,10 +4345,10 @@
           </a:fontRef>
         </p:style>
         <p:txBody>
-          <a:bodyPr rtlCol="0" anchor="ctr" wrap="square" lIns="411480" rIns="365760" tIns="502920" bIns="320040"/>
-          <a:lstStyle/>
-          <a:p>
-            <a:pPr algn="ctr">
+          <a:bodyPr rtlCol="0" anchor="t" wrap="square" lIns="411480" rIns="365760" tIns="502920" bIns="320040"/>
+          <a:lstStyle/>
+          <a:p>
+            <a:pPr algn="l">
               <a:lnSpc>
                 <a:spcPct val="115000"/>
               </a:lnSpc>
@@ -4372,7 +4372,7 @@
             </a:r>
           </a:p>
           <a:p>
-            <a:pPr>
+            <a:pPr algn="l">
               <a:lnSpc>
                 <a:spcPct val="115000"/>
               </a:lnSpc>
@@ -4396,7 +4396,7 @@
             </a:r>
           </a:p>
           <a:p>
-            <a:pPr>
+            <a:pPr algn="l">
               <a:lnSpc>
                 <a:spcPct val="115000"/>
               </a:lnSpc>
@@ -4420,7 +4420,7 @@
             </a:r>
           </a:p>
           <a:p>
-            <a:pPr>
+            <a:pPr algn="l">
               <a:lnSpc>
                 <a:spcPct val="115000"/>
               </a:lnSpc>
@@ -4444,7 +4444,7 @@
             </a:r>
           </a:p>
           <a:p>
-            <a:pPr>
+            <a:pPr algn="l">
               <a:lnSpc>
                 <a:spcPct val="115000"/>
               </a:lnSpc>
@@ -4468,7 +4468,7 @@
             </a:r>
           </a:p>
           <a:p>
-            <a:pPr>
+            <a:pPr algn="l">
               <a:lnSpc>
                 <a:spcPct val="115000"/>
               </a:lnSpc>
@@ -4530,7 +4530,7 @@
           </a:fontRef>
         </p:style>
         <p:txBody>
-          <a:bodyPr rtlCol="0" anchor="ctr"/>
+          <a:bodyPr rtlCol="0" anchor="t" wrap="square"/>
           <a:lstStyle/>
           <a:p>
             <a:pPr algn="ctr"/>
@@ -4600,7 +4600,7 @@
           </a:fontRef>
         </p:style>
         <p:txBody>
-          <a:bodyPr rtlCol="0" anchor="ctr"/>
+          <a:bodyPr rtlCol="0" anchor="t" wrap="square"/>
           <a:lstStyle/>
           <a:p>
             <a:pPr algn="ctr"/>
@@ -4715,7 +4715,7 @@
           </a:fontRef>
         </p:style>
         <p:txBody>
-          <a:bodyPr rtlCol="0" anchor="ctr" wrap="square" lIns="365760" rIns="365760" tIns="228600" bIns="182880"/>
+          <a:bodyPr rtlCol="0" anchor="t" wrap="square" lIns="365760" rIns="365760" tIns="228600" bIns="182880"/>
           <a:lstStyle/>
           <a:p>
             <a:pPr algn="l">
@@ -4850,7 +4850,7 @@
           </a:fontRef>
         </p:style>
         <p:txBody>
-          <a:bodyPr rtlCol="0" anchor="ctr" wrap="square" lIns="365760" rIns="365760" tIns="201168" bIns="182880"/>
+          <a:bodyPr rtlCol="0" anchor="t" wrap="square" lIns="365760" rIns="365760" tIns="201168" bIns="182880"/>
           <a:lstStyle/>
           <a:p>
             <a:pPr algn="l">
@@ -4952,7 +4952,7 @@
           </a:fontRef>
         </p:style>
         <p:txBody>
-          <a:bodyPr rtlCol="0" anchor="ctr"/>
+          <a:bodyPr rtlCol="0" anchor="t" wrap="square"/>
           <a:lstStyle/>
           <a:p>
             <a:pPr algn="ctr"/>
@@ -5208,7 +5208,7 @@
           </a:fontRef>
         </p:style>
         <p:txBody>
-          <a:bodyPr rtlCol="0" anchor="ctr"/>
+          <a:bodyPr rtlCol="0" anchor="t" wrap="square"/>
           <a:lstStyle/>
           <a:p>
             <a:pPr algn="ctr"/>
@@ -5477,7 +5477,7 @@
           </a:fontRef>
         </p:style>
         <p:txBody>
-          <a:bodyPr rtlCol="0" anchor="ctr"/>
+          <a:bodyPr rtlCol="0" anchor="t" wrap="square"/>
           <a:lstStyle/>
           <a:p>
             <a:pPr algn="ctr"/>
@@ -5677,7 +5677,7 @@
           </a:fontRef>
         </p:style>
         <p:txBody>
-          <a:bodyPr rtlCol="0" anchor="ctr"/>
+          <a:bodyPr rtlCol="0" anchor="t" wrap="square"/>
           <a:lstStyle/>
           <a:p>
             <a:pPr algn="ctr"/>
@@ -5911,7 +5911,7 @@
           </a:fontRef>
         </p:style>
         <p:txBody>
-          <a:bodyPr rtlCol="0" anchor="ctr"/>
+          <a:bodyPr rtlCol="0" anchor="t" wrap="square"/>
           <a:lstStyle/>
           <a:p>
             <a:pPr algn="ctr"/>
@@ -6145,7 +6145,7 @@
           </a:fontRef>
         </p:style>
         <p:txBody>
-          <a:bodyPr rtlCol="0" anchor="ctr"/>
+          <a:bodyPr rtlCol="0" anchor="t" wrap="square"/>
           <a:lstStyle/>
           <a:p>
             <a:pPr algn="ctr"/>
@@ -6310,7 +6310,7 @@
           </a:fontRef>
         </p:style>
         <p:txBody>
-          <a:bodyPr rtlCol="0" anchor="ctr"/>
+          <a:bodyPr rtlCol="0" anchor="t" wrap="square"/>
           <a:lstStyle/>
           <a:p>
             <a:pPr algn="ctr"/>
@@ -6612,7 +6612,7 @@
           </a:fontRef>
         </p:style>
         <p:txBody>
-          <a:bodyPr rtlCol="0" anchor="ctr"/>
+          <a:bodyPr rtlCol="0" anchor="t" wrap="square"/>
           <a:lstStyle/>
           <a:p>
             <a:pPr algn="ctr"/>
@@ -6916,7 +6916,7 @@
           </a:fontRef>
         </p:style>
         <p:txBody>
-          <a:bodyPr rtlCol="0" anchor="ctr"/>
+          <a:bodyPr rtlCol="0" anchor="t" wrap="square"/>
           <a:lstStyle/>
           <a:p>
             <a:pPr algn="ctr"/>
@@ -7031,10 +7031,10 @@
           </a:fontRef>
         </p:style>
         <p:txBody>
-          <a:bodyPr rtlCol="0" anchor="ctr" wrap="square" lIns="411480" rIns="365760" tIns="502920" bIns="320040"/>
-          <a:lstStyle/>
-          <a:p>
-            <a:pPr algn="ctr">
+          <a:bodyPr rtlCol="0" anchor="t" wrap="square" lIns="411480" rIns="365760" tIns="502920" bIns="320040"/>
+          <a:lstStyle/>
+          <a:p>
+            <a:pPr algn="l">
               <a:lnSpc>
                 <a:spcPct val="115000"/>
               </a:lnSpc>
@@ -7058,7 +7058,7 @@
             </a:r>
           </a:p>
           <a:p>
-            <a:pPr>
+            <a:pPr algn="l">
               <a:lnSpc>
                 <a:spcPct val="115000"/>
               </a:lnSpc>
@@ -7082,7 +7082,7 @@
             </a:r>
           </a:p>
           <a:p>
-            <a:pPr>
+            <a:pPr algn="l">
               <a:lnSpc>
                 <a:spcPct val="115000"/>
               </a:lnSpc>
@@ -7106,7 +7106,7 @@
             </a:r>
           </a:p>
           <a:p>
-            <a:pPr>
+            <a:pPr algn="l">
               <a:lnSpc>
                 <a:spcPct val="115000"/>
               </a:lnSpc>
@@ -7130,7 +7130,7 @@
             </a:r>
           </a:p>
           <a:p>
-            <a:pPr>
+            <a:pPr algn="l">
               <a:lnSpc>
                 <a:spcPct val="115000"/>
               </a:lnSpc>
@@ -7154,7 +7154,7 @@
             </a:r>
           </a:p>
           <a:p>
-            <a:pPr>
+            <a:pPr algn="l">
               <a:lnSpc>
                 <a:spcPct val="115000"/>
               </a:lnSpc>
@@ -7216,7 +7216,7 @@
           </a:fontRef>
         </p:style>
         <p:txBody>
-          <a:bodyPr rtlCol="0" anchor="ctr"/>
+          <a:bodyPr rtlCol="0" anchor="t" wrap="square"/>
           <a:lstStyle/>
           <a:p>
             <a:pPr algn="ctr"/>
@@ -7286,7 +7286,7 @@
           </a:fontRef>
         </p:style>
         <p:txBody>
-          <a:bodyPr rtlCol="0" anchor="ctr"/>
+          <a:bodyPr rtlCol="0" anchor="t" wrap="square"/>
           <a:lstStyle/>
           <a:p>
             <a:pPr algn="ctr"/>
@@ -7401,7 +7401,7 @@
           </a:fontRef>
         </p:style>
         <p:txBody>
-          <a:bodyPr rtlCol="0" anchor="ctr" wrap="square" lIns="365760" rIns="365760" tIns="228600" bIns="182880"/>
+          <a:bodyPr rtlCol="0" anchor="t" wrap="square" lIns="365760" rIns="365760" tIns="228600" bIns="182880"/>
           <a:lstStyle/>
           <a:p>
             <a:pPr algn="l">
@@ -7536,7 +7536,7 @@
           </a:fontRef>
         </p:style>
         <p:txBody>
-          <a:bodyPr rtlCol="0" anchor="ctr" wrap="square" lIns="365760" rIns="365760" tIns="201168" bIns="182880"/>
+          <a:bodyPr rtlCol="0" anchor="t" wrap="square" lIns="365760" rIns="365760" tIns="201168" bIns="182880"/>
           <a:lstStyle/>
           <a:p>
             <a:pPr algn="l">
@@ -7638,7 +7638,7 @@
           </a:fontRef>
         </p:style>
         <p:txBody>
-          <a:bodyPr rtlCol="0" anchor="ctr"/>
+          <a:bodyPr rtlCol="0" anchor="t" wrap="square"/>
           <a:lstStyle/>
           <a:p>
             <a:pPr algn="ctr"/>
